--- a/ceba/DPPA CfD Consolidated Chart.pptx
+++ b/ceba/DPPA CfD Consolidated Chart.pptx
@@ -3151,7 +3151,7 @@
                 </a:solidFill>
                 <a:latin typeface="Arial"/>
               </a:rPr>
-              <a:t>TOU bands + load/solar/matched + FMP vs strike — one view, like the web app</a:t>
+              <a:t>New TOU bands (Decision 963) + load/solar/matched + FMP vs strike</a:t>
             </a:r>
           </a:p>
         </p:txBody>
